--- a/Documents/Presentation/Project Update/Project Update 1 (week1 & 2).pptx
+++ b/Documents/Presentation/Project Update/Project Update 1 (week1 & 2).pptx
@@ -166,11 +166,13 @@
           <a:bodyPr vert="horz" lIns="91440" tIns="45720" rIns="91440" bIns="45720" rtlCol="0"/>
           <a:lstStyle>
             <a:lvl1pPr algn="l">
-              <a:defRPr sz="1200"/>
+              <a:defRPr sz="1200">
+                <a:latin typeface="Candara" panose="020E0502030303020204" pitchFamily="34" charset="0"/>
+              </a:defRPr>
             </a:lvl1pPr>
           </a:lstStyle>
           <a:p>
-            <a:endParaRPr lang="en-US"/>
+            <a:endParaRPr lang="en-US" dirty="0"/>
           </a:p>
         </p:txBody>
       </p:sp>
@@ -197,15 +199,18 @@
           <a:bodyPr vert="horz" lIns="91440" tIns="45720" rIns="91440" bIns="45720" rtlCol="0"/>
           <a:lstStyle>
             <a:lvl1pPr algn="r">
-              <a:defRPr sz="1200"/>
+              <a:defRPr sz="1200">
+                <a:latin typeface="Candara" panose="020E0502030303020204" pitchFamily="34" charset="0"/>
+              </a:defRPr>
             </a:lvl1pPr>
           </a:lstStyle>
           <a:p>
             <a:fld id="{7FDF1C33-BC8F-41A0-90FC-3DD5B2E75936}" type="datetimeFigureOut">
               <a:rPr lang="en-US" smtClean="0"/>
+              <a:pPr/>
               <a:t>5/30/2026</a:t>
             </a:fld>
-            <a:endParaRPr lang="en-US"/>
+            <a:endParaRPr lang="en-US" dirty="0"/>
           </a:p>
         </p:txBody>
       </p:sp>
@@ -238,7 +243,7 @@
           <a:bodyPr vert="horz" lIns="91440" tIns="45720" rIns="91440" bIns="45720" rtlCol="0" anchor="ctr"/>
           <a:lstStyle/>
           <a:p>
-            <a:endParaRPr lang="en-US"/>
+            <a:endParaRPr lang="en-US" dirty="0"/>
           </a:p>
         </p:txBody>
       </p:sp>
@@ -324,11 +329,13 @@
           <a:bodyPr vert="horz" lIns="91440" tIns="45720" rIns="91440" bIns="45720" rtlCol="0" anchor="b"/>
           <a:lstStyle>
             <a:lvl1pPr algn="l">
-              <a:defRPr sz="1200"/>
+              <a:defRPr sz="1200">
+                <a:latin typeface="Candara" panose="020E0502030303020204" pitchFamily="34" charset="0"/>
+              </a:defRPr>
             </a:lvl1pPr>
           </a:lstStyle>
           <a:p>
-            <a:endParaRPr lang="en-US"/>
+            <a:endParaRPr lang="en-US" dirty="0"/>
           </a:p>
         </p:txBody>
       </p:sp>
@@ -355,15 +362,18 @@
           <a:bodyPr vert="horz" lIns="91440" tIns="45720" rIns="91440" bIns="45720" rtlCol="0" anchor="b"/>
           <a:lstStyle>
             <a:lvl1pPr algn="r">
-              <a:defRPr sz="1200"/>
+              <a:defRPr sz="1200">
+                <a:latin typeface="Candara" panose="020E0502030303020204" pitchFamily="34" charset="0"/>
+              </a:defRPr>
             </a:lvl1pPr>
           </a:lstStyle>
           <a:p>
             <a:fld id="{FAA58D20-C6F5-4CAB-894F-BCB67744F137}" type="slidenum">
               <a:rPr lang="en-US" smtClean="0"/>
+              <a:pPr/>
               <a:t>‹#›</a:t>
             </a:fld>
-            <a:endParaRPr lang="en-US"/>
+            <a:endParaRPr lang="en-US" dirty="0"/>
           </a:p>
         </p:txBody>
       </p:sp>
@@ -381,91 +391,11 @@
         <a:solidFill>
           <a:schemeClr val="tx1"/>
         </a:solidFill>
-        <a:latin typeface="+mn-lt"/>
+        <a:latin typeface="Candara" panose="020E0502030303020204" pitchFamily="34" charset="0"/>
         <a:ea typeface="+mn-ea"/>
         <a:cs typeface="+mn-cs"/>
       </a:defRPr>
     </a:lvl1pPr>
-    <a:lvl2pPr marL="457200" algn="l" defTabSz="914400" rtl="0" eaLnBrk="1" latinLnBrk="0" hangingPunct="1">
-      <a:defRPr sz="1200" kern="1200">
-        <a:solidFill>
-          <a:schemeClr val="tx1"/>
-        </a:solidFill>
-        <a:latin typeface="+mn-lt"/>
-        <a:ea typeface="+mn-ea"/>
-        <a:cs typeface="+mn-cs"/>
-      </a:defRPr>
-    </a:lvl2pPr>
-    <a:lvl3pPr marL="914400" algn="l" defTabSz="914400" rtl="0" eaLnBrk="1" latinLnBrk="0" hangingPunct="1">
-      <a:defRPr sz="1200" kern="1200">
-        <a:solidFill>
-          <a:schemeClr val="tx1"/>
-        </a:solidFill>
-        <a:latin typeface="+mn-lt"/>
-        <a:ea typeface="+mn-ea"/>
-        <a:cs typeface="+mn-cs"/>
-      </a:defRPr>
-    </a:lvl3pPr>
-    <a:lvl4pPr marL="1371600" algn="l" defTabSz="914400" rtl="0" eaLnBrk="1" latinLnBrk="0" hangingPunct="1">
-      <a:defRPr sz="1200" kern="1200">
-        <a:solidFill>
-          <a:schemeClr val="tx1"/>
-        </a:solidFill>
-        <a:latin typeface="+mn-lt"/>
-        <a:ea typeface="+mn-ea"/>
-        <a:cs typeface="+mn-cs"/>
-      </a:defRPr>
-    </a:lvl4pPr>
-    <a:lvl5pPr marL="1828800" algn="l" defTabSz="914400" rtl="0" eaLnBrk="1" latinLnBrk="0" hangingPunct="1">
-      <a:defRPr sz="1200" kern="1200">
-        <a:solidFill>
-          <a:schemeClr val="tx1"/>
-        </a:solidFill>
-        <a:latin typeface="+mn-lt"/>
-        <a:ea typeface="+mn-ea"/>
-        <a:cs typeface="+mn-cs"/>
-      </a:defRPr>
-    </a:lvl5pPr>
-    <a:lvl6pPr marL="2286000" algn="l" defTabSz="914400" rtl="0" eaLnBrk="1" latinLnBrk="0" hangingPunct="1">
-      <a:defRPr sz="1200" kern="1200">
-        <a:solidFill>
-          <a:schemeClr val="tx1"/>
-        </a:solidFill>
-        <a:latin typeface="+mn-lt"/>
-        <a:ea typeface="+mn-ea"/>
-        <a:cs typeface="+mn-cs"/>
-      </a:defRPr>
-    </a:lvl6pPr>
-    <a:lvl7pPr marL="2743200" algn="l" defTabSz="914400" rtl="0" eaLnBrk="1" latinLnBrk="0" hangingPunct="1">
-      <a:defRPr sz="1200" kern="1200">
-        <a:solidFill>
-          <a:schemeClr val="tx1"/>
-        </a:solidFill>
-        <a:latin typeface="+mn-lt"/>
-        <a:ea typeface="+mn-ea"/>
-        <a:cs typeface="+mn-cs"/>
-      </a:defRPr>
-    </a:lvl7pPr>
-    <a:lvl8pPr marL="3200400" algn="l" defTabSz="914400" rtl="0" eaLnBrk="1" latinLnBrk="0" hangingPunct="1">
-      <a:defRPr sz="1200" kern="1200">
-        <a:solidFill>
-          <a:schemeClr val="tx1"/>
-        </a:solidFill>
-        <a:latin typeface="+mn-lt"/>
-        <a:ea typeface="+mn-ea"/>
-        <a:cs typeface="+mn-cs"/>
-      </a:defRPr>
-    </a:lvl8pPr>
-    <a:lvl9pPr marL="3657600" algn="l" defTabSz="914400" rtl="0" eaLnBrk="1" latinLnBrk="0" hangingPunct="1">
-      <a:defRPr sz="1200" kern="1200">
-        <a:solidFill>
-          <a:schemeClr val="tx1"/>
-        </a:solidFill>
-        <a:latin typeface="+mn-lt"/>
-        <a:ea typeface="+mn-ea"/>
-        <a:cs typeface="+mn-cs"/>
-      </a:defRPr>
-    </a:lvl9pPr>
   </p:notesStyle>
 </p:notesMaster>
 </file>
@@ -5384,17 +5314,17 @@
           <a:lstStyle/>
           <a:p>
             <a:r>
-              <a:rPr lang="en-US" dirty="0">
+              <a:rPr lang="en-US" sz="3600">
                 <a:latin typeface="Candara" panose="020E0502030303020204" pitchFamily="34" charset="0"/>
               </a:rPr>
-              <a:t>Summary</a:t>
+              <a:t>Milestone Summary</a:t>
             </a:r>
             <a:br>
-              <a:rPr lang="en-US" dirty="0">
+              <a:rPr lang="en-US" sz="3600" dirty="0">
                 <a:latin typeface="Candara" panose="020E0502030303020204" pitchFamily="34" charset="0"/>
               </a:rPr>
             </a:br>
-            <a:endParaRPr lang="en-US" dirty="0">
+            <a:endParaRPr lang="en-US" sz="3600" dirty="0">
               <a:latin typeface="Candara" panose="020E0502030303020204" pitchFamily="34" charset="0"/>
             </a:endParaRPr>
           </a:p>
@@ -5424,101 +5354,107 @@
         </p:spPr>
         <p:txBody>
           <a:bodyPr>
-            <a:normAutofit fontScale="92500" lnSpcReduction="10000"/>
+            <a:normAutofit/>
           </a:bodyPr>
           <a:lstStyle/>
           <a:p>
             <a:r>
-              <a:rPr lang="en-US" b="1" dirty="0"/>
+              <a:rPr lang="en-US" sz="1800" b="1" dirty="0"/>
               <a:t>Status: Completed</a:t>
             </a:r>
-            <a:endParaRPr lang="en-US" dirty="0"/>
-          </a:p>
-          <a:p>
-            <a:r>
-              <a:rPr lang="en-US" b="1" dirty="0"/>
+            <a:endParaRPr lang="en-US" sz="1800" dirty="0"/>
+          </a:p>
+          <a:p>
+            <a:r>
+              <a:rPr lang="en-US" sz="1800" b="1" dirty="0"/>
               <a:t>Goal:</a:t>
             </a:r>
             <a:r>
-              <a:rPr lang="en-US" dirty="0"/>
+              <a:rPr lang="en-US" sz="1800" dirty="0"/>
               <a:t> Define project scope, requirements, and architecture before build (database, backend, frontend).</a:t>
             </a:r>
           </a:p>
           <a:p>
-            <a:br>
-              <a:rPr lang="en-US" dirty="0"/>
-            </a:br>
-            <a:r>
-              <a:rPr lang="en-US" b="1" dirty="0"/>
+            <a:endParaRPr lang="en-US" sz="1800" dirty="0"/>
+          </a:p>
+          <a:p>
+            <a:r>
+              <a:rPr lang="en-US" sz="1800" b="1" dirty="0"/>
               <a:t>Completed work:</a:t>
             </a:r>
-            <a:endParaRPr lang="en-US" dirty="0"/>
+          </a:p>
+          <a:p>
+            <a:endParaRPr lang="en-US" sz="1800" dirty="0"/>
           </a:p>
           <a:p>
             <a:pPr lvl="1"/>
             <a:r>
-              <a:rPr lang="en-US" dirty="0"/>
+              <a:rPr lang="en-US" sz="1800" dirty="0"/>
               <a:t>Project charter &amp; scope (001_Overview.md)</a:t>
             </a:r>
           </a:p>
           <a:p>
             <a:pPr lvl="1"/>
             <a:r>
-              <a:rPr lang="en-US" dirty="0"/>
+              <a:rPr lang="en-US" sz="1800" dirty="0"/>
               <a:t>Functional requirements — devices, sensors, readings, alerts, commands, roles (002_Requirements.md)</a:t>
             </a:r>
           </a:p>
           <a:p>
             <a:pPr lvl="1"/>
             <a:r>
-              <a:rPr lang="en-US" dirty="0"/>
+              <a:rPr lang="en-US" sz="1800" dirty="0"/>
               <a:t>Tech stack: ASP.NET Core 8, React + TypeScript, SQL Server, EF Core, MQTT, </a:t>
             </a:r>
             <a:r>
-              <a:rPr lang="en-US" dirty="0" err="1"/>
+              <a:rPr lang="en-US" sz="1800" dirty="0" err="1"/>
               <a:t>SignalR</a:t>
             </a:r>
             <a:r>
-              <a:rPr lang="en-US" dirty="0"/>
+              <a:rPr lang="en-US" sz="1800" dirty="0"/>
               <a:t>, JWT</a:t>
             </a:r>
           </a:p>
           <a:p>
             <a:pPr lvl="1"/>
             <a:r>
-              <a:rPr lang="en-US" dirty="0"/>
+              <a:rPr lang="en-US" sz="1800" dirty="0"/>
               <a:t>Layered architecture &amp; data pipeline (004_ApplicationDesign.md)</a:t>
             </a:r>
           </a:p>
           <a:p>
             <a:pPr lvl="1"/>
             <a:r>
-              <a:rPr lang="en-US" dirty="0"/>
+              <a:rPr lang="en-US" sz="1800" dirty="0"/>
               <a:t>MQTT topics: devices/{id}/sensors/{id}/readings, devices/{id}/commands</a:t>
             </a:r>
           </a:p>
           <a:p>
             <a:pPr lvl="1"/>
             <a:r>
-              <a:rPr lang="en-US" dirty="0"/>
+              <a:rPr lang="en-US" sz="1800" dirty="0"/>
               <a:t>Development schedule: plan → data → backend → frontend → test → present</a:t>
             </a:r>
           </a:p>
           <a:p>
-            <a:r>
-              <a:rPr lang="en-US" b="1" dirty="0"/>
+            <a:pPr lvl="1"/>
+            <a:endParaRPr lang="en-US" sz="1800" dirty="0"/>
+          </a:p>
+          <a:p>
+            <a:r>
+              <a:rPr lang="en-US" sz="1800" b="1" dirty="0"/>
               <a:t>Progress:</a:t>
             </a:r>
             <a:r>
-              <a:rPr lang="en-US" dirty="0"/>
+              <a:rPr lang="en-US" sz="1800" dirty="0"/>
               <a:t> Charter approved; requirements documented; architecture defined (MQTT → API → SQL → </a:t>
             </a:r>
             <a:r>
-              <a:rPr lang="en-US" dirty="0" err="1"/>
+              <a:rPr lang="en-US" sz="1800" dirty="0" err="1"/>
               <a:t>SignalR</a:t>
             </a:r>
             <a:r>
-              <a:rPr lang="en-US" dirty="0"/>
+              <a:rPr lang="en-US" sz="1800" dirty="0"/>
               <a:t> → React).</a:t>
             </a:r>
           </a:p>
@@ -5578,340 +5514,246 @@
         </p:spPr>
         <p:txBody>
           <a:bodyPr>
-            <a:normAutofit fontScale="90000"/>
+            <a:noAutofit/>
           </a:bodyPr>
           <a:lstStyle/>
           <a:p>
             <a:r>
-              <a:rPr lang="en-US" dirty="0"/>
+              <a:rPr lang="en-US" sz="3600" dirty="0"/>
               <a:t>Evidences/ Screenshots</a:t>
             </a:r>
             <a:br>
-              <a:rPr lang="en-US" dirty="0"/>
+              <a:rPr lang="en-US" sz="3600" dirty="0"/>
             </a:br>
-            <a:endParaRPr lang="en-US" dirty="0"/>
-          </a:p>
-        </p:txBody>
-      </p:sp>
-      <p:graphicFrame>
-        <p:nvGraphicFramePr>
-          <p:cNvPr id="6" name="Content Placeholder 5">
-            <a:extLst>
-              <a:ext uri="{FF2B5EF4-FFF2-40B4-BE49-F238E27FC236}">
-                <a16:creationId xmlns:a16="http://schemas.microsoft.com/office/drawing/2014/main" id="{7DC85F25-755F-3393-F6D5-08DBA7AB7161}"/>
-              </a:ext>
-            </a:extLst>
-          </p:cNvPr>
-          <p:cNvGraphicFramePr>
-            <a:graphicFrameLocks noGrp="1"/>
-          </p:cNvGraphicFramePr>
-          <p:nvPr>
-            <p:ph idx="1"/>
-            <p:extLst>
-              <p:ext uri="{D42A27DB-BD31-4B8C-83A1-F6EECF244321}">
-                <p14:modId xmlns:p14="http://schemas.microsoft.com/office/powerpoint/2010/main" val="3317167409"/>
-              </p:ext>
-            </p:extLst>
-          </p:nvPr>
-        </p:nvGraphicFramePr>
-        <p:xfrm>
-          <a:off x="838200" y="2725367"/>
-          <a:ext cx="9652000" cy="1965165"/>
-        </p:xfrm>
-        <a:graphic>
-          <a:graphicData uri="http://schemas.openxmlformats.org/drawingml/2006/table">
-            <a:tbl>
-              <a:tblPr/>
-              <a:tblGrid>
-                <a:gridCol w="4826000">
-                  <a:extLst>
-                    <a:ext uri="{9D8B030D-6E8A-4147-A177-3AD203B41FA5}">
-                      <a16:colId xmlns:a16="http://schemas.microsoft.com/office/drawing/2014/main" val="2492795899"/>
-                    </a:ext>
-                  </a:extLst>
-                </a:gridCol>
-                <a:gridCol w="4826000">
-                  <a:extLst>
-                    <a:ext uri="{9D8B030D-6E8A-4147-A177-3AD203B41FA5}">
-                      <a16:colId xmlns:a16="http://schemas.microsoft.com/office/drawing/2014/main" val="2750506280"/>
-                    </a:ext>
-                  </a:extLst>
-                </a:gridCol>
-              </a:tblGrid>
-              <a:tr h="655055">
-                <a:tc>
-                  <a:txBody>
-                    <a:bodyPr/>
-                    <a:lstStyle/>
-                    <a:p>
-                      <a:pPr algn="l" fontAlgn="t" latinLnBrk="0">
-                        <a:buNone/>
-                      </a:pPr>
-                      <a:r>
-                        <a:rPr lang="en-US" b="1" dirty="0">
-                          <a:effectLst/>
-                          <a:latin typeface="Candara" panose="020E0502030303020204" pitchFamily="34" charset="0"/>
-                        </a:rPr>
-                        <a:t>Fig. 1 — Charter / scope</a:t>
-                      </a:r>
-                      <a:endParaRPr lang="en-US" dirty="0">
-                        <a:effectLst/>
-                      </a:endParaRPr>
-                    </a:p>
-                  </a:txBody>
-                  <a:tcPr marL="68580" marR="68580" marT="38100" marB="38100">
-                    <a:lnL>
-                      <a:noFill/>
-                    </a:lnL>
-                    <a:lnR>
-                      <a:noFill/>
-                    </a:lnR>
-                    <a:lnT>
-                      <a:noFill/>
-                    </a:lnT>
-                    <a:lnB>
-                      <a:noFill/>
-                    </a:lnB>
-                    <a:solidFill>
-                      <a:srgbClr val="F8F8F8"/>
-                    </a:solidFill>
-                  </a:tcPr>
-                </a:tc>
-                <a:tc>
-                  <a:txBody>
-                    <a:bodyPr/>
-                    <a:lstStyle/>
-                    <a:p>
-                      <a:pPr algn="l" fontAlgn="t" latinLnBrk="0">
-                        <a:buNone/>
-                      </a:pPr>
-                      <a:r>
-                        <a:rPr lang="en-US" dirty="0">
-                          <a:effectLst/>
-                          <a:latin typeface="Candara" panose="020E0502030303020204" pitchFamily="34" charset="0"/>
-                        </a:rPr>
-                        <a:t>[Screenshot: project overview slide or </a:t>
-                      </a:r>
-                      <a:r>
-                        <a:rPr lang="en-US" dirty="0">
-                          <a:solidFill>
-                            <a:srgbClr val="3685BF"/>
-                          </a:solidFill>
-                          <a:effectLst/>
-                          <a:latin typeface="Consolas" panose="020B0609020204030204" pitchFamily="49" charset="0"/>
-                        </a:rPr>
-                        <a:t>001_Overview.md</a:t>
-                      </a:r>
-                      <a:r>
-                        <a:rPr lang="en-US" dirty="0">
-                          <a:effectLst/>
-                        </a:rPr>
-                        <a:t> title &amp; purpose section]</a:t>
-                      </a:r>
-                    </a:p>
-                  </a:txBody>
-                  <a:tcPr marL="68580" marR="68580" marT="38100" marB="38100">
-                    <a:lnL>
-                      <a:noFill/>
-                    </a:lnL>
-                    <a:lnR>
-                      <a:noFill/>
-                    </a:lnR>
-                    <a:lnT>
-                      <a:noFill/>
-                    </a:lnT>
-                    <a:lnB>
-                      <a:noFill/>
-                    </a:lnB>
-                    <a:solidFill>
-                      <a:srgbClr val="F8F8F8"/>
-                    </a:solidFill>
-                  </a:tcPr>
-                </a:tc>
-                <a:extLst>
-                  <a:ext uri="{0D108BD9-81ED-4DB2-BD59-A6C34878D82A}">
-                    <a16:rowId xmlns:a16="http://schemas.microsoft.com/office/drawing/2014/main" val="3134948865"/>
-                  </a:ext>
-                </a:extLst>
-              </a:tr>
-              <a:tr h="655055">
-                <a:tc>
-                  <a:txBody>
-                    <a:bodyPr/>
-                    <a:lstStyle/>
-                    <a:p>
-                      <a:pPr algn="l" fontAlgn="t" latinLnBrk="0">
-                        <a:buNone/>
-                      </a:pPr>
-                      <a:r>
-                        <a:rPr lang="en-US" b="1" dirty="0">
-                          <a:effectLst/>
-                          <a:latin typeface="Candara" panose="020E0502030303020204" pitchFamily="34" charset="0"/>
-                        </a:rPr>
-                        <a:t>Fig. 2 — Architecture</a:t>
-                      </a:r>
-                      <a:endParaRPr lang="en-US" dirty="0">
-                        <a:effectLst/>
-                      </a:endParaRPr>
-                    </a:p>
-                  </a:txBody>
-                  <a:tcPr marL="68580" marR="68580" marT="38100" marB="38100">
-                    <a:lnL>
-                      <a:noFill/>
-                    </a:lnL>
-                    <a:lnR>
-                      <a:noFill/>
-                    </a:lnR>
-                    <a:lnT>
-                      <a:noFill/>
-                    </a:lnT>
-                    <a:lnB>
-                      <a:noFill/>
-                    </a:lnB>
-                    <a:solidFill>
-                      <a:srgbClr val="F8F8F8"/>
-                    </a:solidFill>
-                  </a:tcPr>
-                </a:tc>
-                <a:tc>
-                  <a:txBody>
-                    <a:bodyPr/>
-                    <a:lstStyle/>
-                    <a:p>
-                      <a:pPr algn="l" fontAlgn="t" latinLnBrk="0">
-                        <a:buNone/>
-                      </a:pPr>
-                      <a:r>
-                        <a:rPr lang="en-US" dirty="0">
-                          <a:effectLst/>
-                          <a:latin typeface="Candara" panose="020E0502030303020204" pitchFamily="34" charset="0"/>
-                        </a:rPr>
-                        <a:t>[Screenshot: architecture diagram — edge → MQTT → API → SQL → </a:t>
-                      </a:r>
-                      <a:r>
-                        <a:rPr lang="en-US" dirty="0" err="1">
-                          <a:effectLst/>
-                          <a:latin typeface="Candara" panose="020E0502030303020204" pitchFamily="34" charset="0"/>
-                        </a:rPr>
-                        <a:t>SignalR</a:t>
-                      </a:r>
-                      <a:r>
-                        <a:rPr lang="en-US" dirty="0">
-                          <a:effectLst/>
-                          <a:latin typeface="Candara" panose="020E0502030303020204" pitchFamily="34" charset="0"/>
-                        </a:rPr>
-                        <a:t> → React]</a:t>
-                      </a:r>
-                    </a:p>
-                  </a:txBody>
-                  <a:tcPr marL="68580" marR="68580" marT="38100" marB="38100">
-                    <a:lnL>
-                      <a:noFill/>
-                    </a:lnL>
-                    <a:lnR>
-                      <a:noFill/>
-                    </a:lnR>
-                    <a:lnT>
-                      <a:noFill/>
-                    </a:lnT>
-                    <a:lnB>
-                      <a:noFill/>
-                    </a:lnB>
-                    <a:solidFill>
-                      <a:srgbClr val="F8F8F8"/>
-                    </a:solidFill>
-                  </a:tcPr>
-                </a:tc>
-                <a:extLst>
-                  <a:ext uri="{0D108BD9-81ED-4DB2-BD59-A6C34878D82A}">
-                    <a16:rowId xmlns:a16="http://schemas.microsoft.com/office/drawing/2014/main" val="1282823878"/>
-                  </a:ext>
-                </a:extLst>
-              </a:tr>
-              <a:tr h="655055">
-                <a:tc>
-                  <a:txBody>
-                    <a:bodyPr/>
-                    <a:lstStyle/>
-                    <a:p>
-                      <a:pPr algn="l" fontAlgn="t" latinLnBrk="0">
-                        <a:buNone/>
-                      </a:pPr>
-                      <a:r>
-                        <a:rPr lang="en-US" b="1" dirty="0">
-                          <a:effectLst/>
-                          <a:latin typeface="Candara" panose="020E0502030303020204" pitchFamily="34" charset="0"/>
-                        </a:rPr>
-                        <a:t>Fig. 3 — Requirements</a:t>
-                      </a:r>
-                      <a:endParaRPr lang="en-US" dirty="0">
-                        <a:effectLst/>
-                      </a:endParaRPr>
-                    </a:p>
-                  </a:txBody>
-                  <a:tcPr marL="68580" marR="68580" marT="38100" marB="38100">
-                    <a:lnL>
-                      <a:noFill/>
-                    </a:lnL>
-                    <a:lnR>
-                      <a:noFill/>
-                    </a:lnR>
-                    <a:lnT>
-                      <a:noFill/>
-                    </a:lnT>
-                    <a:lnB>
-                      <a:noFill/>
-                    </a:lnB>
-                    <a:solidFill>
-                      <a:srgbClr val="F8F8F8"/>
-                    </a:solidFill>
-                  </a:tcPr>
-                </a:tc>
-                <a:tc>
-                  <a:txBody>
-                    <a:bodyPr/>
-                    <a:lstStyle/>
-                    <a:p>
-                      <a:pPr algn="l" fontAlgn="t" latinLnBrk="0">
-                        <a:buNone/>
-                      </a:pPr>
-                      <a:r>
-                        <a:rPr lang="en-US" dirty="0">
-                          <a:effectLst/>
-                          <a:latin typeface="Candara" panose="020E0502030303020204" pitchFamily="34" charset="0"/>
-                        </a:rPr>
-                        <a:t>[Screenshot: requirements doc table of contents or sample FR items]</a:t>
-                      </a:r>
-                    </a:p>
-                  </a:txBody>
-                  <a:tcPr marL="68580" marR="68580" marT="38100" marB="38100">
-                    <a:lnL>
-                      <a:noFill/>
-                    </a:lnL>
-                    <a:lnR>
-                      <a:noFill/>
-                    </a:lnR>
-                    <a:lnT>
-                      <a:noFill/>
-                    </a:lnT>
-                    <a:lnB>
-                      <a:noFill/>
-                    </a:lnB>
-                    <a:solidFill>
-                      <a:srgbClr val="F8F8F8"/>
-                    </a:solidFill>
-                  </a:tcPr>
-                </a:tc>
-                <a:extLst>
-                  <a:ext uri="{0D108BD9-81ED-4DB2-BD59-A6C34878D82A}">
-                    <a16:rowId xmlns:a16="http://schemas.microsoft.com/office/drawing/2014/main" val="650659228"/>
-                  </a:ext>
-                </a:extLst>
-              </a:tr>
-            </a:tbl>
-          </a:graphicData>
-        </a:graphic>
-      </p:graphicFrame>
+            <a:endParaRPr lang="en-US" sz="3600" dirty="0"/>
+          </a:p>
+        </p:txBody>
+      </p:sp>
+      <p:sp>
+        <p:nvSpPr>
+          <p:cNvPr id="4" name="TextBox 3">
+            <a:extLst>
+              <a:ext uri="{FF2B5EF4-FFF2-40B4-BE49-F238E27FC236}">
+                <a16:creationId xmlns:a16="http://schemas.microsoft.com/office/drawing/2014/main" id="{A0103EE7-B7BE-2A1A-03EE-94BA1DDEC490}"/>
+              </a:ext>
+            </a:extLst>
+          </p:cNvPr>
+          <p:cNvSpPr txBox="1"/>
+          <p:nvPr/>
+        </p:nvSpPr>
+        <p:spPr>
+          <a:xfrm>
+            <a:off x="1219200" y="1787835"/>
+            <a:ext cx="6096000" cy="369332"/>
+          </a:xfrm>
+          <a:prstGeom prst="rect">
+            <a:avLst/>
+          </a:prstGeom>
+          <a:noFill/>
+        </p:spPr>
+        <p:txBody>
+          <a:bodyPr wrap="square">
+            <a:spAutoFit/>
+          </a:bodyPr>
+          <a:lstStyle/>
+          <a:p>
+            <a:pPr algn="l" fontAlgn="t" latinLnBrk="0">
+              <a:buNone/>
+            </a:pPr>
+            <a:r>
+              <a:rPr lang="en-US" b="1" dirty="0">
+                <a:effectLst/>
+                <a:latin typeface="Candara" panose="020E0502030303020204" pitchFamily="34" charset="0"/>
+              </a:rPr>
+              <a:t>Fig. 1 — Charter / scope</a:t>
+            </a:r>
+            <a:endParaRPr lang="en-US" dirty="0">
+              <a:effectLst/>
+              <a:latin typeface="Candara" panose="020E0502030303020204" pitchFamily="34" charset="0"/>
+            </a:endParaRPr>
+          </a:p>
+        </p:txBody>
+      </p:sp>
+      <p:sp>
+        <p:nvSpPr>
+          <p:cNvPr id="7" name="TextBox 6">
+            <a:extLst>
+              <a:ext uri="{FF2B5EF4-FFF2-40B4-BE49-F238E27FC236}">
+                <a16:creationId xmlns:a16="http://schemas.microsoft.com/office/drawing/2014/main" id="{5E153A66-B02A-E20D-71E9-94E73863E781}"/>
+              </a:ext>
+            </a:extLst>
+          </p:cNvPr>
+          <p:cNvSpPr txBox="1"/>
+          <p:nvPr/>
+        </p:nvSpPr>
+        <p:spPr>
+          <a:xfrm>
+            <a:off x="5023154" y="1787835"/>
+            <a:ext cx="6096000" cy="369332"/>
+          </a:xfrm>
+          <a:prstGeom prst="rect">
+            <a:avLst/>
+          </a:prstGeom>
+          <a:noFill/>
+        </p:spPr>
+        <p:txBody>
+          <a:bodyPr wrap="square">
+            <a:spAutoFit/>
+          </a:bodyPr>
+          <a:lstStyle/>
+          <a:p>
+            <a:pPr algn="l" fontAlgn="t" latinLnBrk="0">
+              <a:buNone/>
+            </a:pPr>
+            <a:r>
+              <a:rPr lang="en-US" b="1" dirty="0">
+                <a:effectLst/>
+                <a:latin typeface="Candara" panose="020E0502030303020204" pitchFamily="34" charset="0"/>
+              </a:rPr>
+              <a:t>Fig. 2 — Architecture</a:t>
+            </a:r>
+            <a:endParaRPr lang="en-US" dirty="0">
+              <a:effectLst/>
+              <a:latin typeface="Candara" panose="020E0502030303020204" pitchFamily="34" charset="0"/>
+            </a:endParaRPr>
+          </a:p>
+        </p:txBody>
+      </p:sp>
+      <p:sp>
+        <p:nvSpPr>
+          <p:cNvPr id="9" name="TextBox 8">
+            <a:extLst>
+              <a:ext uri="{FF2B5EF4-FFF2-40B4-BE49-F238E27FC236}">
+                <a16:creationId xmlns:a16="http://schemas.microsoft.com/office/drawing/2014/main" id="{B792BE4E-425D-3BA7-4A89-672D5CAE47EE}"/>
+              </a:ext>
+            </a:extLst>
+          </p:cNvPr>
+          <p:cNvSpPr txBox="1"/>
+          <p:nvPr/>
+        </p:nvSpPr>
+        <p:spPr>
+          <a:xfrm>
+            <a:off x="8913223" y="1787835"/>
+            <a:ext cx="6096000" cy="369332"/>
+          </a:xfrm>
+          <a:prstGeom prst="rect">
+            <a:avLst/>
+          </a:prstGeom>
+          <a:noFill/>
+        </p:spPr>
+        <p:txBody>
+          <a:bodyPr wrap="square">
+            <a:spAutoFit/>
+          </a:bodyPr>
+          <a:lstStyle/>
+          <a:p>
+            <a:pPr algn="l" fontAlgn="t" latinLnBrk="0">
+              <a:buNone/>
+            </a:pPr>
+            <a:r>
+              <a:rPr lang="en-US" b="1" dirty="0">
+                <a:effectLst/>
+                <a:latin typeface="Candara" panose="020E0502030303020204" pitchFamily="34" charset="0"/>
+              </a:rPr>
+              <a:t>Fig. 3 — Requirements</a:t>
+            </a:r>
+            <a:endParaRPr lang="en-US" dirty="0">
+              <a:effectLst/>
+              <a:latin typeface="Candara" panose="020E0502030303020204" pitchFamily="34" charset="0"/>
+            </a:endParaRPr>
+          </a:p>
+        </p:txBody>
+      </p:sp>
+      <p:pic>
+        <p:nvPicPr>
+          <p:cNvPr id="13" name="Picture 12" descr="The diagram illustrates a comprehensive system architecture with various components such as external systems, frontend, backend, data layer, and services including REST controllers, device services, repositories, SignalR, and MQTT broker.&#10;&#10;AI-generated content may be incorrect.">
+            <a:extLst>
+              <a:ext uri="{FF2B5EF4-FFF2-40B4-BE49-F238E27FC236}">
+                <a16:creationId xmlns:a16="http://schemas.microsoft.com/office/drawing/2014/main" id="{F07B7259-CA8C-C1C0-B51F-3E6AB02AD66D}"/>
+              </a:ext>
+            </a:extLst>
+          </p:cNvPr>
+          <p:cNvPicPr>
+            <a:picLocks noChangeAspect="1"/>
+          </p:cNvPicPr>
+          <p:nvPr/>
+        </p:nvPicPr>
+        <p:blipFill>
+          <a:blip r:embed="rId2"/>
+          <a:stretch>
+            <a:fillRect/>
+          </a:stretch>
+        </p:blipFill>
+        <p:spPr>
+          <a:xfrm>
+            <a:off x="4097382" y="3071948"/>
+            <a:ext cx="3997236" cy="2257698"/>
+          </a:xfrm>
+          <a:prstGeom prst="rect">
+            <a:avLst/>
+          </a:prstGeom>
+        </p:spPr>
+      </p:pic>
+      <p:pic>
+        <p:nvPicPr>
+          <p:cNvPr id="17" name="Picture 16" descr="The image illustrates a list of functional requirements for an IoT device management system, detailing high-priority functionalities for device registration and configuration.&#10;&#10;AI-generated content may be incorrect.">
+            <a:extLst>
+              <a:ext uri="{FF2B5EF4-FFF2-40B4-BE49-F238E27FC236}">
+                <a16:creationId xmlns:a16="http://schemas.microsoft.com/office/drawing/2014/main" id="{86F57A4C-73B9-015F-E0C4-EBEE9E824623}"/>
+              </a:ext>
+            </a:extLst>
+          </p:cNvPr>
+          <p:cNvPicPr>
+            <a:picLocks noChangeAspect="1"/>
+          </p:cNvPicPr>
+          <p:nvPr/>
+        </p:nvPicPr>
+        <p:blipFill>
+          <a:blip r:embed="rId3"/>
+          <a:stretch>
+            <a:fillRect/>
+          </a:stretch>
+        </p:blipFill>
+        <p:spPr>
+          <a:xfrm>
+            <a:off x="8294258" y="3071948"/>
+            <a:ext cx="3497149" cy="2257698"/>
+          </a:xfrm>
+          <a:prstGeom prst="rect">
+            <a:avLst/>
+          </a:prstGeom>
+        </p:spPr>
+      </p:pic>
+      <p:pic>
+        <p:nvPicPr>
+          <p:cNvPr id="19" name="Picture 18" descr="The image depicts a project charter for a web-based IoT device real-time monitoring system, aimed at data collection, status visualization, historical data visualization, and alert generation, utilizing software development, database design, and real-time system knowledge.&#10;&#10;AI-generated content may be incorrect.">
+            <a:extLst>
+              <a:ext uri="{FF2B5EF4-FFF2-40B4-BE49-F238E27FC236}">
+                <a16:creationId xmlns:a16="http://schemas.microsoft.com/office/drawing/2014/main" id="{386EF98D-39B4-4420-D0B0-1CB8346B9EAB}"/>
+              </a:ext>
+            </a:extLst>
+          </p:cNvPr>
+          <p:cNvPicPr>
+            <a:picLocks noChangeAspect="1"/>
+          </p:cNvPicPr>
+          <p:nvPr/>
+        </p:nvPicPr>
+        <p:blipFill>
+          <a:blip r:embed="rId4"/>
+          <a:stretch>
+            <a:fillRect/>
+          </a:stretch>
+        </p:blipFill>
+        <p:spPr>
+          <a:xfrm>
+            <a:off x="481149" y="3071948"/>
+            <a:ext cx="3342357" cy="2257698"/>
+          </a:xfrm>
+          <a:prstGeom prst="rect">
+            <a:avLst/>
+          </a:prstGeom>
+        </p:spPr>
+      </p:pic>
     </p:spTree>
     <p:extLst>
       <p:ext uri="{BB962C8B-B14F-4D97-AF65-F5344CB8AC3E}">
@@ -5966,18 +5808,18 @@
         </p:spPr>
         <p:txBody>
           <a:bodyPr>
-            <a:normAutofit fontScale="90000"/>
+            <a:normAutofit/>
           </a:bodyPr>
           <a:lstStyle/>
           <a:p>
             <a:r>
-              <a:rPr lang="en-US" dirty="0"/>
+              <a:rPr lang="en-US" sz="3600" dirty="0"/>
               <a:t>Problems &amp; solutions</a:t>
             </a:r>
             <a:br>
-              <a:rPr lang="en-US" dirty="0"/>
+              <a:rPr lang="en-US" sz="3600" dirty="0"/>
             </a:br>
-            <a:endParaRPr lang="en-US" dirty="0"/>
+            <a:endParaRPr lang="en-US" sz="3600" dirty="0"/>
           </a:p>
         </p:txBody>
       </p:sp>
@@ -6122,6 +5964,7 @@
                       <a:r>
                         <a:rPr lang="en-US" dirty="0">
                           <a:effectLst/>
+                          <a:latin typeface="Candara" panose="020E0502030303020204" pitchFamily="34" charset="0"/>
                         </a:rPr>
                         <a:t> for capstone timeline</a:t>
                       </a:r>
@@ -6205,6 +6048,7 @@
                       <a:r>
                         <a:rPr lang="en-US" b="1" dirty="0">
                           <a:effectLst/>
+                          <a:latin typeface="Candara" panose="020E0502030303020204" pitchFamily="34" charset="0"/>
                         </a:rPr>
                         <a:t>MQTT vs HTTP</a:t>
                       </a:r>
@@ -6294,6 +6138,7 @@
                       <a:r>
                         <a:rPr lang="en-US" dirty="0">
                           <a:effectLst/>
+                          <a:latin typeface="Candara" panose="020E0502030303020204" pitchFamily="34" charset="0"/>
                         </a:rPr>
                         <a:t> not defined early</a:t>
                       </a:r>
@@ -6524,17 +6369,19 @@
           </a:xfrm>
         </p:spPr>
         <p:txBody>
-          <a:bodyPr/>
+          <a:bodyPr>
+            <a:normAutofit/>
+          </a:bodyPr>
           <a:lstStyle/>
           <a:p>
             <a:r>
-              <a:rPr lang="en-US" i="1" dirty="0"/>
+              <a:rPr lang="en-US" sz="1800" i="1" dirty="0"/>
               <a:t>No other critical blockers at this milestone.</a:t>
             </a:r>
-            <a:endParaRPr lang="en-US" dirty="0"/>
-          </a:p>
-          <a:p>
-            <a:endParaRPr lang="en-US" dirty="0"/>
+            <a:endParaRPr lang="en-US" sz="1800" dirty="0"/>
+          </a:p>
+          <a:p>
+            <a:endParaRPr lang="en-US" sz="1800" dirty="0"/>
           </a:p>
         </p:txBody>
       </p:sp>
@@ -6616,31 +6463,38 @@
             <p:ph idx="1"/>
           </p:nvPr>
         </p:nvSpPr>
-        <p:spPr/>
-        <p:txBody>
-          <a:bodyPr/>
+        <p:spPr>
+          <a:xfrm>
+            <a:off x="838200" y="1825625"/>
+            <a:ext cx="8754533" cy="2009775"/>
+          </a:xfrm>
+        </p:spPr>
+        <p:txBody>
+          <a:bodyPr>
+            <a:normAutofit/>
+          </a:bodyPr>
           <a:lstStyle/>
           <a:p>
             <a:r>
-              <a:rPr lang="en-US" b="1" dirty="0"/>
+              <a:rPr lang="en-US" sz="1800" b="1" dirty="0"/>
               <a:t>Learned:</a:t>
             </a:r>
             <a:r>
-              <a:rPr lang="en-US" dirty="0"/>
+              <a:rPr lang="en-US" sz="1800" dirty="0"/>
               <a:t> Clear requirements and architecture reduce rework; defining MQTT topics and roles early prevents integration issues later.</a:t>
             </a:r>
             <a:br>
-              <a:rPr lang="en-US" dirty="0"/>
+              <a:rPr lang="en-US" sz="1800" dirty="0"/>
             </a:br>
-            <a:endParaRPr lang="en-US" dirty="0"/>
-          </a:p>
-          <a:p>
-            <a:r>
-              <a:rPr lang="en-US" b="1" dirty="0"/>
+            <a:endParaRPr lang="en-US" sz="1800" dirty="0"/>
+          </a:p>
+          <a:p>
+            <a:r>
+              <a:rPr lang="en-US" sz="1800" b="1" dirty="0"/>
               <a:t>Next (Week 3–4):</a:t>
             </a:r>
             <a:r>
-              <a:rPr lang="en-US" dirty="0"/>
+              <a:rPr lang="en-US" sz="1800" dirty="0"/>
               <a:t> SQL Server schema, EF Core entities, migrations, and seed/test data.</a:t>
             </a:r>
           </a:p>
